--- a/lecture-slides_upload/lecture/05_Statistical Methods_Association Between Groups_update2022.pptx
+++ b/lecture-slides_upload/lecture/05_Statistical Methods_Association Between Groups_update2022.pptx
@@ -5,28 +5,29 @@
     <p:sldMasterId id="2147483648" r:id="rId1"/>
   </p:sldMasterIdLst>
   <p:notesMasterIdLst>
-    <p:notesMasterId r:id="rId21"/>
+    <p:notesMasterId r:id="rId22"/>
   </p:notesMasterIdLst>
   <p:sldIdLst>
-    <p:sldId id="257" r:id="rId2"/>
-    <p:sldId id="303" r:id="rId3"/>
-    <p:sldId id="304" r:id="rId4"/>
-    <p:sldId id="305" r:id="rId5"/>
-    <p:sldId id="308" r:id="rId6"/>
-    <p:sldId id="311" r:id="rId7"/>
-    <p:sldId id="314" r:id="rId8"/>
-    <p:sldId id="336" r:id="rId9"/>
-    <p:sldId id="317" r:id="rId10"/>
-    <p:sldId id="324" r:id="rId11"/>
-    <p:sldId id="325" r:id="rId12"/>
-    <p:sldId id="334" r:id="rId13"/>
-    <p:sldId id="326" r:id="rId14"/>
-    <p:sldId id="328" r:id="rId15"/>
-    <p:sldId id="338" r:id="rId16"/>
-    <p:sldId id="335" r:id="rId17"/>
-    <p:sldId id="337" r:id="rId18"/>
-    <p:sldId id="260" r:id="rId19"/>
-    <p:sldId id="261" r:id="rId20"/>
+    <p:sldId id="339" r:id="rId2"/>
+    <p:sldId id="257" r:id="rId3"/>
+    <p:sldId id="303" r:id="rId4"/>
+    <p:sldId id="304" r:id="rId5"/>
+    <p:sldId id="305" r:id="rId6"/>
+    <p:sldId id="308" r:id="rId7"/>
+    <p:sldId id="311" r:id="rId8"/>
+    <p:sldId id="314" r:id="rId9"/>
+    <p:sldId id="336" r:id="rId10"/>
+    <p:sldId id="317" r:id="rId11"/>
+    <p:sldId id="324" r:id="rId12"/>
+    <p:sldId id="325" r:id="rId13"/>
+    <p:sldId id="334" r:id="rId14"/>
+    <p:sldId id="326" r:id="rId15"/>
+    <p:sldId id="328" r:id="rId16"/>
+    <p:sldId id="338" r:id="rId17"/>
+    <p:sldId id="335" r:id="rId18"/>
+    <p:sldId id="337" r:id="rId19"/>
+    <p:sldId id="260" r:id="rId20"/>
+    <p:sldId id="261" r:id="rId21"/>
   </p:sldIdLst>
   <p:sldSz cx="12192000" cy="6858000"/>
   <p:notesSz cx="6858000" cy="9144000"/>
@@ -227,7 +228,7 @@
           <a:p>
             <a:fld id="{6A4B1ABF-BAF2-0E4B-88A8-8F2BBF0074AC}" type="datetimeFigureOut">
               <a:rPr lang="en-US" smtClean="0"/>
-              <a:t>2/15/24</a:t>
+              <a:t>9/30/25</a:t>
             </a:fld>
             <a:endParaRPr lang="en-US"/>
           </a:p>
@@ -559,7 +560,7 @@
           <a:p>
             <a:fld id="{66610047-E131-0346-ABBC-77645D001C55}" type="slidenum">
               <a:rPr lang="en-US" smtClean="0"/>
-              <a:t>1</a:t>
+              <a:t>2</a:t>
             </a:fld>
             <a:endParaRPr lang="en-US"/>
           </a:p>
@@ -617,7 +618,7 @@
                 <a:latin typeface="Arial" pitchFamily="34" charset="0"/>
               </a:rPr>
               <a:pPr/>
-              <a:t>4</a:t>
+              <a:t>5</a:t>
             </a:fld>
             <a:endParaRPr lang="en-US">
               <a:latin typeface="Arial" pitchFamily="34" charset="0"/>
@@ -785,7 +786,7 @@
           <a:p>
             <a:fld id="{66610047-E131-0346-ABBC-77645D001C55}" type="slidenum">
               <a:rPr lang="en-US" smtClean="0"/>
-              <a:t>5</a:t>
+              <a:t>6</a:t>
             </a:fld>
             <a:endParaRPr lang="en-US"/>
           </a:p>
@@ -880,7 +881,7 @@
           <a:p>
             <a:fld id="{66610047-E131-0346-ABBC-77645D001C55}" type="slidenum">
               <a:rPr lang="en-US" smtClean="0"/>
-              <a:t>9</a:t>
+              <a:t>10</a:t>
             </a:fld>
             <a:endParaRPr lang="en-US"/>
           </a:p>
@@ -936,7 +937,7 @@
             <a:fld id="{78C0F84D-088B-422D-8773-4DCB76F0F99C}" type="slidenum">
               <a:rPr lang="en-US" smtClean="0"/>
               <a:pPr/>
-              <a:t>14</a:t>
+              <a:t>15</a:t>
             </a:fld>
             <a:endParaRPr lang="en-US"/>
           </a:p>
@@ -1032,7 +1033,7 @@
             <a:fld id="{78C0F84D-088B-422D-8773-4DCB76F0F99C}" type="slidenum">
               <a:rPr lang="en-US" smtClean="0"/>
               <a:pPr/>
-              <a:t>16</a:t>
+              <a:t>17</a:t>
             </a:fld>
             <a:endParaRPr lang="en-US"/>
           </a:p>
@@ -1243,7 +1244,7 @@
           <a:p>
             <a:fld id="{BA763BF8-AC66-E249-9CE8-8353EEB16B82}" type="datetimeFigureOut">
               <a:rPr lang="en-US" smtClean="0"/>
-              <a:t>2/15/24</a:t>
+              <a:t>9/30/25</a:t>
             </a:fld>
             <a:endParaRPr lang="en-US"/>
           </a:p>
@@ -1445,7 +1446,7 @@
           <a:p>
             <a:fld id="{BA763BF8-AC66-E249-9CE8-8353EEB16B82}" type="datetimeFigureOut">
               <a:rPr lang="en-US" smtClean="0"/>
-              <a:t>2/15/24</a:t>
+              <a:t>9/30/25</a:t>
             </a:fld>
             <a:endParaRPr lang="en-US"/>
           </a:p>
@@ -1653,7 +1654,7 @@
           <a:p>
             <a:fld id="{BA763BF8-AC66-E249-9CE8-8353EEB16B82}" type="datetimeFigureOut">
               <a:rPr lang="en-US" smtClean="0"/>
-              <a:t>2/15/24</a:t>
+              <a:t>9/30/25</a:t>
             </a:fld>
             <a:endParaRPr lang="en-US"/>
           </a:p>
@@ -1855,7 +1856,7 @@
           <a:p>
             <a:fld id="{BA763BF8-AC66-E249-9CE8-8353EEB16B82}" type="datetimeFigureOut">
               <a:rPr lang="en-US" smtClean="0"/>
-              <a:t>2/15/24</a:t>
+              <a:t>9/30/25</a:t>
             </a:fld>
             <a:endParaRPr lang="en-US"/>
           </a:p>
@@ -2130,7 +2131,7 @@
           <a:p>
             <a:fld id="{BA763BF8-AC66-E249-9CE8-8353EEB16B82}" type="datetimeFigureOut">
               <a:rPr lang="en-US" smtClean="0"/>
-              <a:t>2/15/24</a:t>
+              <a:t>9/30/25</a:t>
             </a:fld>
             <a:endParaRPr lang="en-US"/>
           </a:p>
@@ -2399,7 +2400,7 @@
           <a:p>
             <a:fld id="{BA763BF8-AC66-E249-9CE8-8353EEB16B82}" type="datetimeFigureOut">
               <a:rPr lang="en-US" smtClean="0"/>
-              <a:t>2/15/24</a:t>
+              <a:t>9/30/25</a:t>
             </a:fld>
             <a:endParaRPr lang="en-US"/>
           </a:p>
@@ -2815,7 +2816,7 @@
           <a:p>
             <a:fld id="{BA763BF8-AC66-E249-9CE8-8353EEB16B82}" type="datetimeFigureOut">
               <a:rPr lang="en-US" smtClean="0"/>
-              <a:t>2/15/24</a:t>
+              <a:t>9/30/25</a:t>
             </a:fld>
             <a:endParaRPr lang="en-US"/>
           </a:p>
@@ -2960,7 +2961,7 @@
           <a:p>
             <a:fld id="{BA763BF8-AC66-E249-9CE8-8353EEB16B82}" type="datetimeFigureOut">
               <a:rPr lang="en-US" smtClean="0"/>
-              <a:t>2/15/24</a:t>
+              <a:t>9/30/25</a:t>
             </a:fld>
             <a:endParaRPr lang="en-US"/>
           </a:p>
@@ -3073,7 +3074,7 @@
           <a:p>
             <a:fld id="{BA763BF8-AC66-E249-9CE8-8353EEB16B82}" type="datetimeFigureOut">
               <a:rPr lang="en-US" smtClean="0"/>
-              <a:t>2/15/24</a:t>
+              <a:t>9/30/25</a:t>
             </a:fld>
             <a:endParaRPr lang="en-US"/>
           </a:p>
@@ -3384,7 +3385,7 @@
           <a:p>
             <a:fld id="{BA763BF8-AC66-E249-9CE8-8353EEB16B82}" type="datetimeFigureOut">
               <a:rPr lang="en-US" smtClean="0"/>
-              <a:t>2/15/24</a:t>
+              <a:t>9/30/25</a:t>
             </a:fld>
             <a:endParaRPr lang="en-US"/>
           </a:p>
@@ -3672,7 +3673,7 @@
           <a:p>
             <a:fld id="{BA763BF8-AC66-E249-9CE8-8353EEB16B82}" type="datetimeFigureOut">
               <a:rPr lang="en-US" smtClean="0"/>
-              <a:t>2/15/24</a:t>
+              <a:t>9/30/25</a:t>
             </a:fld>
             <a:endParaRPr lang="en-US"/>
           </a:p>
@@ -3916,7 +3917,7 @@
             <a:fld id="{BA763BF8-AC66-E249-9CE8-8353EEB16B82}" type="datetimeFigureOut">
               <a:rPr lang="en-US" smtClean="0"/>
               <a:pPr/>
-              <a:t>2/15/24</a:t>
+              <a:t>9/30/25</a:t>
             </a:fld>
             <a:endParaRPr lang="en-US"/>
           </a:p>
@@ -4340,78 +4341,91 @@
       </p:grpSpPr>
       <p:sp>
         <p:nvSpPr>
-          <p:cNvPr id="2" name="Title 1"/>
+          <p:cNvPr id="2" name="Title 1">
+            <a:extLst>
+              <a:ext uri="{FF2B5EF4-FFF2-40B4-BE49-F238E27FC236}">
+                <a16:creationId xmlns:a16="http://schemas.microsoft.com/office/drawing/2014/main" id="{78DD7A14-C945-6BA6-7ECC-14FD496E96DB}"/>
+              </a:ext>
+            </a:extLst>
+          </p:cNvPr>
           <p:cNvSpPr>
             <a:spLocks noGrp="1"/>
           </p:cNvSpPr>
           <p:nvPr>
-            <p:ph type="ctrTitle"/>
+            <p:ph type="title"/>
           </p:nvPr>
         </p:nvSpPr>
         <p:spPr/>
-        <p:txBody>
-          <a:bodyPr>
-            <a:normAutofit/>
-          </a:bodyPr>
-          <a:lstStyle/>
-          <a:p>
-            <a:r>
-              <a:rPr lang="en-GB" dirty="0"/>
-              <a:t>Correlation</a:t>
-            </a:r>
-          </a:p>
-        </p:txBody>
-      </p:sp>
-      <p:sp>
-        <p:nvSpPr>
-          <p:cNvPr id="3" name="Subtitle 2"/>
-          <p:cNvSpPr>
-            <a:spLocks noGrp="1"/>
-          </p:cNvSpPr>
-          <p:nvPr>
-            <p:ph type="subTitle" idx="1"/>
-          </p:nvPr>
-        </p:nvSpPr>
-        <p:spPr>
-          <a:xfrm>
-            <a:off x="1524000" y="3869324"/>
-            <a:ext cx="9144000" cy="1655762"/>
-          </a:xfrm>
-        </p:spPr>
         <p:txBody>
           <a:bodyPr/>
           <a:lstStyle/>
           <a:p>
             <a:r>
-              <a:rPr lang="en-GB" dirty="0"/>
-              <a:t>Jamil </a:t>
-            </a:r>
-            <a:r>
-              <a:rPr lang="en-GB" dirty="0" err="1"/>
-              <a:t>Bhanji</a:t>
-            </a:r>
-            <a:endParaRPr lang="en-GB" dirty="0"/>
-          </a:p>
-          <a:p>
-            <a:r>
-              <a:rPr lang="en-GB" dirty="0"/>
-              <a:t>with help from Vanessa </a:t>
-            </a:r>
-            <a:r>
-              <a:rPr lang="en-GB" dirty="0" err="1"/>
-              <a:t>Lobue</a:t>
-            </a:r>
-            <a:r>
-              <a:rPr lang="en-GB" dirty="0"/>
-              <a:t> and Andy Field</a:t>
-            </a:r>
+              <a:rPr lang="en-US" dirty="0"/>
+              <a:t>Central Limit Theorem</a:t>
+            </a:r>
+          </a:p>
+        </p:txBody>
+      </p:sp>
+      <p:sp>
+        <p:nvSpPr>
+          <p:cNvPr id="3" name="Content Placeholder 2">
+            <a:extLst>
+              <a:ext uri="{FF2B5EF4-FFF2-40B4-BE49-F238E27FC236}">
+                <a16:creationId xmlns:a16="http://schemas.microsoft.com/office/drawing/2014/main" id="{CA8F5C6B-3F1D-4943-B8CD-4036AB2DFB45}"/>
+              </a:ext>
+            </a:extLst>
+          </p:cNvPr>
+          <p:cNvSpPr>
+            <a:spLocks noGrp="1"/>
+          </p:cNvSpPr>
+          <p:nvPr>
+            <p:ph idx="1"/>
+          </p:nvPr>
+        </p:nvSpPr>
+        <p:spPr/>
+        <p:txBody>
+          <a:bodyPr/>
+          <a:lstStyle/>
+          <a:p>
+            <a:r>
+              <a:rPr lang="en-US" dirty="0"/>
+              <a:t>Regardless of the underlying distribution:</a:t>
+            </a:r>
+          </a:p>
+          <a:p>
+            <a:pPr lvl="1"/>
+            <a:r>
+              <a:rPr lang="en-US" dirty="0"/>
+              <a:t>Expected value of sample means is the population mean</a:t>
+            </a:r>
+          </a:p>
+          <a:p>
+            <a:pPr lvl="1"/>
+            <a:r>
+              <a:rPr lang="en-US" dirty="0"/>
+              <a:t>With N&gt;30, sample means are distributed normally, with mean = population mean, and </a:t>
+            </a:r>
+            <a:r>
+              <a:rPr lang="en-US" dirty="0" err="1"/>
+              <a:t>sd</a:t>
+            </a:r>
+            <a:r>
+              <a:rPr lang="en-US" dirty="0"/>
+              <a:t> </a:t>
+            </a:r>
+            <a:r>
+              <a:rPr lang="en-US"/>
+              <a:t>= standard error </a:t>
+            </a:r>
+            <a:endParaRPr lang="en-US" dirty="0"/>
           </a:p>
         </p:txBody>
       </p:sp>
     </p:spTree>
     <p:extLst>
       <p:ext uri="{BB962C8B-B14F-4D97-AF65-F5344CB8AC3E}">
-        <p14:creationId xmlns:p14="http://schemas.microsoft.com/office/powerpoint/2010/main" val="907586198"/>
+        <p14:creationId xmlns:p14="http://schemas.microsoft.com/office/powerpoint/2010/main" val="3133342102"/>
       </p:ext>
     </p:extLst>
   </p:cSld>
@@ -4422,6 +4436,361 @@
 </file>
 
 <file path=ppt/slides/slide10.xml><?xml version="1.0" encoding="utf-8"?>
+<p:sld xmlns:a="http://schemas.openxmlformats.org/drawingml/2006/main" xmlns:r="http://schemas.openxmlformats.org/officeDocument/2006/relationships" xmlns:p="http://schemas.openxmlformats.org/presentationml/2006/main">
+  <p:cSld>
+    <p:spTree>
+      <p:nvGrpSpPr>
+        <p:cNvPr id="1" name=""/>
+        <p:cNvGrpSpPr/>
+        <p:nvPr/>
+      </p:nvGrpSpPr>
+      <p:grpSpPr>
+        <a:xfrm>
+          <a:off x="0" y="0"/>
+          <a:ext cx="0" cy="0"/>
+          <a:chOff x="0" y="0"/>
+          <a:chExt cx="0" cy="0"/>
+        </a:xfrm>
+      </p:grpSpPr>
+      <p:sp>
+        <p:nvSpPr>
+          <p:cNvPr id="2" name="Title 1"/>
+          <p:cNvSpPr>
+            <a:spLocks noGrp="1"/>
+          </p:cNvSpPr>
+          <p:nvPr>
+            <p:ph type="title"/>
+          </p:nvPr>
+        </p:nvSpPr>
+        <p:spPr/>
+        <p:txBody>
+          <a:bodyPr/>
+          <a:lstStyle/>
+          <a:p>
+            <a:r>
+              <a:rPr lang="en-GB" dirty="0"/>
+              <a:t>Problems with Covariance</a:t>
+            </a:r>
+          </a:p>
+        </p:txBody>
+      </p:sp>
+      <p:sp>
+        <p:nvSpPr>
+          <p:cNvPr id="3" name="Content Placeholder 2"/>
+          <p:cNvSpPr>
+            <a:spLocks noGrp="1"/>
+          </p:cNvSpPr>
+          <p:nvPr>
+            <p:ph idx="1"/>
+          </p:nvPr>
+        </p:nvSpPr>
+        <p:spPr>
+          <a:xfrm>
+            <a:off x="838200" y="1690688"/>
+            <a:ext cx="10515600" cy="4351338"/>
+          </a:xfrm>
+        </p:spPr>
+        <p:txBody>
+          <a:bodyPr>
+            <a:noAutofit/>
+          </a:bodyPr>
+          <a:lstStyle/>
+          <a:p>
+            <a:r>
+              <a:rPr lang="en-GB" sz="3200" dirty="0"/>
+              <a:t>It depends upon the units of measurement</a:t>
+            </a:r>
+          </a:p>
+          <a:p>
+            <a:pPr lvl="1"/>
+            <a:r>
+              <a:rPr lang="en-GB" sz="3200" dirty="0"/>
+              <a:t>E.g. The covariance of two variables measured in Miles might be 4.25, but if the same scores are converted to km, the covariance is 11</a:t>
+            </a:r>
+          </a:p>
+          <a:p>
+            <a:r>
+              <a:rPr lang="en-GB" sz="3200" dirty="0"/>
+              <a:t>One solution: standardise it!</a:t>
+            </a:r>
+          </a:p>
+          <a:p>
+            <a:pPr lvl="1"/>
+            <a:r>
+              <a:rPr lang="en-GB" sz="3200" dirty="0"/>
+              <a:t>Divide by the standard deviations of both variables</a:t>
+            </a:r>
+          </a:p>
+          <a:p>
+            <a:r>
+              <a:rPr lang="en-GB" sz="3200" dirty="0"/>
+              <a:t>The standardised version of covariance is known as the </a:t>
+            </a:r>
+            <a:r>
+              <a:rPr lang="en-GB" sz="3200" b="1" dirty="0"/>
+              <a:t>correlation coefficient </a:t>
+            </a:r>
+            <a:r>
+              <a:rPr lang="en-GB" sz="3200" dirty="0"/>
+              <a:t>– equivalent to the covariance of the standardized variables</a:t>
+            </a:r>
+          </a:p>
+          <a:p>
+            <a:endParaRPr lang="en-GB" sz="3200" dirty="0"/>
+          </a:p>
+        </p:txBody>
+      </p:sp>
+    </p:spTree>
+  </p:cSld>
+  <p:clrMapOvr>
+    <a:masterClrMapping/>
+  </p:clrMapOvr>
+  <p:timing>
+    <p:tnLst>
+      <p:par>
+        <p:cTn id="1" dur="indefinite" restart="never" nodeType="tmRoot">
+          <p:childTnLst>
+            <p:seq concurrent="1" nextAc="seek">
+              <p:cTn id="2" dur="indefinite" nodeType="mainSeq">
+                <p:childTnLst>
+                  <p:par>
+                    <p:cTn id="3" fill="hold">
+                      <p:stCondLst>
+                        <p:cond delay="indefinite"/>
+                      </p:stCondLst>
+                      <p:childTnLst>
+                        <p:par>
+                          <p:cTn id="4" fill="hold">
+                            <p:stCondLst>
+                              <p:cond delay="0"/>
+                            </p:stCondLst>
+                            <p:childTnLst>
+                              <p:par>
+                                <p:cTn id="5" presetID="1" presetClass="entr" presetSubtype="0" fill="hold" grpId="0" nodeType="clickEffect">
+                                  <p:stCondLst>
+                                    <p:cond delay="0"/>
+                                  </p:stCondLst>
+                                  <p:childTnLst>
+                                    <p:set>
+                                      <p:cBhvr>
+                                        <p:cTn id="6" dur="1" fill="hold">
+                                          <p:stCondLst>
+                                            <p:cond delay="0"/>
+                                          </p:stCondLst>
+                                        </p:cTn>
+                                        <p:tgtEl>
+                                          <p:spTgt spid="3">
+                                            <p:txEl>
+                                              <p:pRg st="0" end="0"/>
+                                            </p:txEl>
+                                          </p:spTgt>
+                                        </p:tgtEl>
+                                        <p:attrNameLst>
+                                          <p:attrName>style.visibility</p:attrName>
+                                        </p:attrNameLst>
+                                      </p:cBhvr>
+                                      <p:to>
+                                        <p:strVal val="visible"/>
+                                      </p:to>
+                                    </p:set>
+                                  </p:childTnLst>
+                                </p:cTn>
+                              </p:par>
+                              <p:par>
+                                <p:cTn id="7" presetID="1" presetClass="entr" presetSubtype="0" fill="hold" grpId="0" nodeType="withEffect">
+                                  <p:stCondLst>
+                                    <p:cond delay="0"/>
+                                  </p:stCondLst>
+                                  <p:childTnLst>
+                                    <p:set>
+                                      <p:cBhvr>
+                                        <p:cTn id="8" dur="1" fill="hold">
+                                          <p:stCondLst>
+                                            <p:cond delay="0"/>
+                                          </p:stCondLst>
+                                        </p:cTn>
+                                        <p:tgtEl>
+                                          <p:spTgt spid="3">
+                                            <p:txEl>
+                                              <p:pRg st="1" end="1"/>
+                                            </p:txEl>
+                                          </p:spTgt>
+                                        </p:tgtEl>
+                                        <p:attrNameLst>
+                                          <p:attrName>style.visibility</p:attrName>
+                                        </p:attrNameLst>
+                                      </p:cBhvr>
+                                      <p:to>
+                                        <p:strVal val="visible"/>
+                                      </p:to>
+                                    </p:set>
+                                  </p:childTnLst>
+                                </p:cTn>
+                              </p:par>
+                            </p:childTnLst>
+                          </p:cTn>
+                        </p:par>
+                      </p:childTnLst>
+                    </p:cTn>
+                  </p:par>
+                  <p:par>
+                    <p:cTn id="9" fill="hold">
+                      <p:stCondLst>
+                        <p:cond delay="indefinite"/>
+                      </p:stCondLst>
+                      <p:childTnLst>
+                        <p:par>
+                          <p:cTn id="10" fill="hold">
+                            <p:stCondLst>
+                              <p:cond delay="0"/>
+                            </p:stCondLst>
+                            <p:childTnLst>
+                              <p:par>
+                                <p:cTn id="11" presetID="1" presetClass="entr" presetSubtype="0" fill="hold" grpId="0" nodeType="clickEffect">
+                                  <p:stCondLst>
+                                    <p:cond delay="0"/>
+                                  </p:stCondLst>
+                                  <p:childTnLst>
+                                    <p:set>
+                                      <p:cBhvr>
+                                        <p:cTn id="12" dur="1" fill="hold">
+                                          <p:stCondLst>
+                                            <p:cond delay="0"/>
+                                          </p:stCondLst>
+                                        </p:cTn>
+                                        <p:tgtEl>
+                                          <p:spTgt spid="3">
+                                            <p:txEl>
+                                              <p:pRg st="2" end="2"/>
+                                            </p:txEl>
+                                          </p:spTgt>
+                                        </p:tgtEl>
+                                        <p:attrNameLst>
+                                          <p:attrName>style.visibility</p:attrName>
+                                        </p:attrNameLst>
+                                      </p:cBhvr>
+                                      <p:to>
+                                        <p:strVal val="visible"/>
+                                      </p:to>
+                                    </p:set>
+                                  </p:childTnLst>
+                                </p:cTn>
+                              </p:par>
+                              <p:par>
+                                <p:cTn id="13" presetID="1" presetClass="entr" presetSubtype="0" fill="hold" grpId="0" nodeType="withEffect">
+                                  <p:stCondLst>
+                                    <p:cond delay="0"/>
+                                  </p:stCondLst>
+                                  <p:childTnLst>
+                                    <p:set>
+                                      <p:cBhvr>
+                                        <p:cTn id="14" dur="1" fill="hold">
+                                          <p:stCondLst>
+                                            <p:cond delay="0"/>
+                                          </p:stCondLst>
+                                        </p:cTn>
+                                        <p:tgtEl>
+                                          <p:spTgt spid="3">
+                                            <p:txEl>
+                                              <p:pRg st="3" end="3"/>
+                                            </p:txEl>
+                                          </p:spTgt>
+                                        </p:tgtEl>
+                                        <p:attrNameLst>
+                                          <p:attrName>style.visibility</p:attrName>
+                                        </p:attrNameLst>
+                                      </p:cBhvr>
+                                      <p:to>
+                                        <p:strVal val="visible"/>
+                                      </p:to>
+                                    </p:set>
+                                  </p:childTnLst>
+                                </p:cTn>
+                              </p:par>
+                            </p:childTnLst>
+                          </p:cTn>
+                        </p:par>
+                      </p:childTnLst>
+                    </p:cTn>
+                  </p:par>
+                  <p:par>
+                    <p:cTn id="15" fill="hold">
+                      <p:stCondLst>
+                        <p:cond delay="indefinite"/>
+                      </p:stCondLst>
+                      <p:childTnLst>
+                        <p:par>
+                          <p:cTn id="16" fill="hold">
+                            <p:stCondLst>
+                              <p:cond delay="0"/>
+                            </p:stCondLst>
+                            <p:childTnLst>
+                              <p:par>
+                                <p:cTn id="17" presetID="1" presetClass="entr" presetSubtype="0" fill="hold" grpId="0" nodeType="clickEffect">
+                                  <p:stCondLst>
+                                    <p:cond delay="0"/>
+                                  </p:stCondLst>
+                                  <p:childTnLst>
+                                    <p:set>
+                                      <p:cBhvr>
+                                        <p:cTn id="18" dur="1" fill="hold">
+                                          <p:stCondLst>
+                                            <p:cond delay="0"/>
+                                          </p:stCondLst>
+                                        </p:cTn>
+                                        <p:tgtEl>
+                                          <p:spTgt spid="3">
+                                            <p:txEl>
+                                              <p:pRg st="4" end="4"/>
+                                            </p:txEl>
+                                          </p:spTgt>
+                                        </p:tgtEl>
+                                        <p:attrNameLst>
+                                          <p:attrName>style.visibility</p:attrName>
+                                        </p:attrNameLst>
+                                      </p:cBhvr>
+                                      <p:to>
+                                        <p:strVal val="visible"/>
+                                      </p:to>
+                                    </p:set>
+                                  </p:childTnLst>
+                                </p:cTn>
+                              </p:par>
+                            </p:childTnLst>
+                          </p:cTn>
+                        </p:par>
+                      </p:childTnLst>
+                    </p:cTn>
+                  </p:par>
+                </p:childTnLst>
+              </p:cTn>
+              <p:prevCondLst>
+                <p:cond evt="onPrev" delay="0">
+                  <p:tgtEl>
+                    <p:sldTgt/>
+                  </p:tgtEl>
+                </p:cond>
+              </p:prevCondLst>
+              <p:nextCondLst>
+                <p:cond evt="onNext" delay="0">
+                  <p:tgtEl>
+                    <p:sldTgt/>
+                  </p:tgtEl>
+                </p:cond>
+              </p:nextCondLst>
+            </p:seq>
+          </p:childTnLst>
+        </p:cTn>
+      </p:par>
+    </p:tnLst>
+    <p:bldLst>
+      <p:bldP spid="3" grpId="0" build="p"/>
+    </p:bldLst>
+  </p:timing>
+</p:sld>
+</file>
+
+<file path=ppt/slides/slide11.xml><?xml version="1.0" encoding="utf-8"?>
 <p:sld xmlns:a="http://schemas.openxmlformats.org/drawingml/2006/main" xmlns:r="http://schemas.openxmlformats.org/officeDocument/2006/relationships" xmlns:p="http://schemas.openxmlformats.org/presentationml/2006/main">
   <p:cSld>
     <p:spTree>
@@ -4892,7 +5261,7 @@
 </p:sld>
 </file>
 
-<file path=ppt/slides/slide11.xml><?xml version="1.0" encoding="utf-8"?>
+<file path=ppt/slides/slide12.xml><?xml version="1.0" encoding="utf-8"?>
 <p:sld xmlns:a="http://schemas.openxmlformats.org/drawingml/2006/main" xmlns:r="http://schemas.openxmlformats.org/officeDocument/2006/relationships" xmlns:p="http://schemas.openxmlformats.org/presentationml/2006/main">
   <p:cSld>
     <p:spTree>
@@ -4960,7 +5329,7 @@
             </a:r>
             <a:r>
               <a:rPr lang="en-GB" sz="3200" dirty="0"/>
-              <a:t>:</a:t>
+              <a:t>: (internal validity)</a:t>
             </a:r>
           </a:p>
           <a:p>
@@ -4979,7 +5348,7 @@
             </a:r>
             <a:r>
               <a:rPr lang="en-GB" sz="3200" dirty="0"/>
-              <a:t>:</a:t>
+              <a:t>: (temporal precedence)</a:t>
             </a:r>
           </a:p>
           <a:p>
@@ -5194,7 +5563,7 @@
 </p:sld>
 </file>
 
-<file path=ppt/slides/slide12.xml><?xml version="1.0" encoding="utf-8"?>
+<file path=ppt/slides/slide13.xml><?xml version="1.0" encoding="utf-8"?>
 <p:sld xmlns:a="http://schemas.openxmlformats.org/drawingml/2006/main" xmlns:r="http://schemas.openxmlformats.org/officeDocument/2006/relationships" xmlns:p="http://schemas.openxmlformats.org/presentationml/2006/main">
   <p:cSld>
     <p:spTree>
@@ -5406,7 +5775,7 @@
 </p:sld>
 </file>
 
-<file path=ppt/slides/slide13.xml><?xml version="1.0" encoding="utf-8"?>
+<file path=ppt/slides/slide14.xml><?xml version="1.0" encoding="utf-8"?>
 <p:sld xmlns:a="http://schemas.openxmlformats.org/drawingml/2006/main" xmlns:r="http://schemas.openxmlformats.org/officeDocument/2006/relationships" xmlns:p="http://schemas.openxmlformats.org/presentationml/2006/main">
   <p:cSld>
     <p:spTree>
@@ -5703,7 +6072,7 @@
 </p:sld>
 </file>
 
-<file path=ppt/slides/slide14.xml><?xml version="1.0" encoding="utf-8"?>
+<file path=ppt/slides/slide15.xml><?xml version="1.0" encoding="utf-8"?>
 <p:sld xmlns:a="http://schemas.openxmlformats.org/drawingml/2006/main" xmlns:r="http://schemas.openxmlformats.org/officeDocument/2006/relationships" xmlns:p="http://schemas.openxmlformats.org/presentationml/2006/main" showMasterPhAnim="0">
   <p:cSld>
     <p:spTree>
@@ -5923,7 +6292,7 @@
 </p:sld>
 </file>
 
-<file path=ppt/slides/slide15.xml><?xml version="1.0" encoding="utf-8"?>
+<file path=ppt/slides/slide16.xml><?xml version="1.0" encoding="utf-8"?>
 <p:sld xmlns:a="http://schemas.openxmlformats.org/drawingml/2006/main" xmlns:r="http://schemas.openxmlformats.org/officeDocument/2006/relationships" xmlns:p="http://schemas.openxmlformats.org/presentationml/2006/main">
   <p:cSld>
     <p:spTree>
@@ -6320,7 +6689,7 @@
 </p:sld>
 </file>
 
-<file path=ppt/slides/slide16.xml><?xml version="1.0" encoding="utf-8"?>
+<file path=ppt/slides/slide17.xml><?xml version="1.0" encoding="utf-8"?>
 <p:sld xmlns:a="http://schemas.openxmlformats.org/drawingml/2006/main" xmlns:r="http://schemas.openxmlformats.org/officeDocument/2006/relationships" xmlns:p="http://schemas.openxmlformats.org/presentationml/2006/main" showMasterPhAnim="0">
   <p:cSld>
     <p:spTree>
@@ -6629,7 +6998,7 @@
 </p:sld>
 </file>
 
-<file path=ppt/slides/slide17.xml><?xml version="1.0" encoding="utf-8"?>
+<file path=ppt/slides/slide18.xml><?xml version="1.0" encoding="utf-8"?>
 <p:sld xmlns:a="http://schemas.openxmlformats.org/drawingml/2006/main" xmlns:r="http://schemas.openxmlformats.org/officeDocument/2006/relationships" xmlns:p="http://schemas.openxmlformats.org/presentationml/2006/main">
   <p:cSld>
     <p:spTree>
@@ -7001,7 +7370,7 @@
 </p:sld>
 </file>
 
-<file path=ppt/slides/slide18.xml><?xml version="1.0" encoding="utf-8"?>
+<file path=ppt/slides/slide19.xml><?xml version="1.0" encoding="utf-8"?>
 <p:sld xmlns:a="http://schemas.openxmlformats.org/drawingml/2006/main" xmlns:r="http://schemas.openxmlformats.org/officeDocument/2006/relationships" xmlns:p="http://schemas.openxmlformats.org/presentationml/2006/main">
   <p:cSld>
     <p:spTree>
@@ -7176,7 +7545,107 @@
 </p:sld>
 </file>
 
-<file path=ppt/slides/slide19.xml><?xml version="1.0" encoding="utf-8"?>
+<file path=ppt/slides/slide2.xml><?xml version="1.0" encoding="utf-8"?>
+<p:sld xmlns:a="http://schemas.openxmlformats.org/drawingml/2006/main" xmlns:r="http://schemas.openxmlformats.org/officeDocument/2006/relationships" xmlns:p="http://schemas.openxmlformats.org/presentationml/2006/main">
+  <p:cSld>
+    <p:spTree>
+      <p:nvGrpSpPr>
+        <p:cNvPr id="1" name=""/>
+        <p:cNvGrpSpPr/>
+        <p:nvPr/>
+      </p:nvGrpSpPr>
+      <p:grpSpPr>
+        <a:xfrm>
+          <a:off x="0" y="0"/>
+          <a:ext cx="0" cy="0"/>
+          <a:chOff x="0" y="0"/>
+          <a:chExt cx="0" cy="0"/>
+        </a:xfrm>
+      </p:grpSpPr>
+      <p:sp>
+        <p:nvSpPr>
+          <p:cNvPr id="2" name="Title 1"/>
+          <p:cNvSpPr>
+            <a:spLocks noGrp="1"/>
+          </p:cNvSpPr>
+          <p:nvPr>
+            <p:ph type="ctrTitle"/>
+          </p:nvPr>
+        </p:nvSpPr>
+        <p:spPr/>
+        <p:txBody>
+          <a:bodyPr>
+            <a:normAutofit/>
+          </a:bodyPr>
+          <a:lstStyle/>
+          <a:p>
+            <a:r>
+              <a:rPr lang="en-GB" dirty="0"/>
+              <a:t>Correlation</a:t>
+            </a:r>
+          </a:p>
+        </p:txBody>
+      </p:sp>
+      <p:sp>
+        <p:nvSpPr>
+          <p:cNvPr id="3" name="Subtitle 2"/>
+          <p:cNvSpPr>
+            <a:spLocks noGrp="1"/>
+          </p:cNvSpPr>
+          <p:nvPr>
+            <p:ph type="subTitle" idx="1"/>
+          </p:nvPr>
+        </p:nvSpPr>
+        <p:spPr>
+          <a:xfrm>
+            <a:off x="1524000" y="3869324"/>
+            <a:ext cx="9144000" cy="1655762"/>
+          </a:xfrm>
+        </p:spPr>
+        <p:txBody>
+          <a:bodyPr/>
+          <a:lstStyle/>
+          <a:p>
+            <a:r>
+              <a:rPr lang="en-GB" dirty="0"/>
+              <a:t>Jamil </a:t>
+            </a:r>
+            <a:r>
+              <a:rPr lang="en-GB" dirty="0" err="1"/>
+              <a:t>Bhanji</a:t>
+            </a:r>
+            <a:endParaRPr lang="en-GB" dirty="0"/>
+          </a:p>
+          <a:p>
+            <a:r>
+              <a:rPr lang="en-GB" dirty="0"/>
+              <a:t>with help from Vanessa </a:t>
+            </a:r>
+            <a:r>
+              <a:rPr lang="en-GB" dirty="0" err="1"/>
+              <a:t>Lobue</a:t>
+            </a:r>
+            <a:r>
+              <a:rPr lang="en-GB" dirty="0"/>
+              <a:t> and Andy Field</a:t>
+            </a:r>
+          </a:p>
+        </p:txBody>
+      </p:sp>
+    </p:spTree>
+    <p:extLst>
+      <p:ext uri="{BB962C8B-B14F-4D97-AF65-F5344CB8AC3E}">
+        <p14:creationId xmlns:p14="http://schemas.microsoft.com/office/powerpoint/2010/main" val="907586198"/>
+      </p:ext>
+    </p:extLst>
+  </p:cSld>
+  <p:clrMapOvr>
+    <a:masterClrMapping/>
+  </p:clrMapOvr>
+</p:sld>
+</file>
+
+<file path=ppt/slides/slide20.xml><?xml version="1.0" encoding="utf-8"?>
 <p:sld xmlns:a="http://schemas.openxmlformats.org/drawingml/2006/main" xmlns:r="http://schemas.openxmlformats.org/officeDocument/2006/relationships" xmlns:p="http://schemas.openxmlformats.org/presentationml/2006/main">
   <p:cSld>
     <p:spTree>
@@ -7290,7 +7759,7 @@
 </p:sld>
 </file>
 
-<file path=ppt/slides/slide2.xml><?xml version="1.0" encoding="utf-8"?>
+<file path=ppt/slides/slide3.xml><?xml version="1.0" encoding="utf-8"?>
 <p:sld xmlns:a="http://schemas.openxmlformats.org/drawingml/2006/main" xmlns:r="http://schemas.openxmlformats.org/officeDocument/2006/relationships" xmlns:p="http://schemas.openxmlformats.org/presentationml/2006/main">
   <p:cSld>
     <p:spTree>
@@ -7842,7 +8311,7 @@
 </p:sld>
 </file>
 
-<file path=ppt/slides/slide3.xml><?xml version="1.0" encoding="utf-8"?>
+<file path=ppt/slides/slide4.xml><?xml version="1.0" encoding="utf-8"?>
 <p:sld xmlns:a="http://schemas.openxmlformats.org/drawingml/2006/main" xmlns:r="http://schemas.openxmlformats.org/officeDocument/2006/relationships" xmlns:p="http://schemas.openxmlformats.org/presentationml/2006/main">
   <p:cSld>
     <p:spTree>
@@ -8053,7 +8522,7 @@
 </p:sld>
 </file>
 
-<file path=ppt/slides/slide4.xml><?xml version="1.0" encoding="utf-8"?>
+<file path=ppt/slides/slide5.xml><?xml version="1.0" encoding="utf-8"?>
 <p:sld xmlns:a="http://schemas.openxmlformats.org/drawingml/2006/main" xmlns:r="http://schemas.openxmlformats.org/officeDocument/2006/relationships" xmlns:p="http://schemas.openxmlformats.org/presentationml/2006/main" showMasterPhAnim="0">
   <p:cSld>
     <p:spTree>
@@ -8108,7 +8577,7 @@
 </p:sld>
 </file>
 
-<file path=ppt/slides/slide5.xml><?xml version="1.0" encoding="utf-8"?>
+<file path=ppt/slides/slide6.xml><?xml version="1.0" encoding="utf-8"?>
 <p:sld xmlns:a="http://schemas.openxmlformats.org/drawingml/2006/main" xmlns:r="http://schemas.openxmlformats.org/officeDocument/2006/relationships" xmlns:p="http://schemas.openxmlformats.org/presentationml/2006/main">
   <p:cSld>
     <p:spTree>
@@ -8403,7 +8872,7 @@
 </p:sld>
 </file>
 
-<file path=ppt/slides/slide6.xml><?xml version="1.0" encoding="utf-8"?>
+<file path=ppt/slides/slide7.xml><?xml version="1.0" encoding="utf-8"?>
 <p:sld xmlns:a="http://schemas.openxmlformats.org/drawingml/2006/main" xmlns:r="http://schemas.openxmlformats.org/officeDocument/2006/relationships" xmlns:p="http://schemas.openxmlformats.org/presentationml/2006/main">
   <p:cSld>
     <p:spTree>
@@ -8617,7 +9086,7 @@
 </p:sld>
 </file>
 
-<file path=ppt/slides/slide7.xml><?xml version="1.0" encoding="utf-8"?>
+<file path=ppt/slides/slide8.xml><?xml version="1.0" encoding="utf-8"?>
 <p:sld xmlns:a="http://schemas.openxmlformats.org/drawingml/2006/main" xmlns:r="http://schemas.openxmlformats.org/officeDocument/2006/relationships" xmlns:p="http://schemas.openxmlformats.org/presentationml/2006/main">
   <p:cSld>
     <p:spTree>
@@ -9014,7 +9483,7 @@
 </p:sld>
 </file>
 
-<file path=ppt/slides/slide8.xml><?xml version="1.0" encoding="utf-8"?>
+<file path=ppt/slides/slide9.xml><?xml version="1.0" encoding="utf-8"?>
 <p:sld xmlns:a="http://schemas.openxmlformats.org/drawingml/2006/main" xmlns:r="http://schemas.openxmlformats.org/officeDocument/2006/relationships" xmlns:p="http://schemas.openxmlformats.org/presentationml/2006/main">
   <p:cSld>
     <p:spTree>
@@ -9129,361 +9598,6 @@
   <p:clrMapOvr>
     <a:masterClrMapping/>
   </p:clrMapOvr>
-</p:sld>
-</file>
-
-<file path=ppt/slides/slide9.xml><?xml version="1.0" encoding="utf-8"?>
-<p:sld xmlns:a="http://schemas.openxmlformats.org/drawingml/2006/main" xmlns:r="http://schemas.openxmlformats.org/officeDocument/2006/relationships" xmlns:p="http://schemas.openxmlformats.org/presentationml/2006/main">
-  <p:cSld>
-    <p:spTree>
-      <p:nvGrpSpPr>
-        <p:cNvPr id="1" name=""/>
-        <p:cNvGrpSpPr/>
-        <p:nvPr/>
-      </p:nvGrpSpPr>
-      <p:grpSpPr>
-        <a:xfrm>
-          <a:off x="0" y="0"/>
-          <a:ext cx="0" cy="0"/>
-          <a:chOff x="0" y="0"/>
-          <a:chExt cx="0" cy="0"/>
-        </a:xfrm>
-      </p:grpSpPr>
-      <p:sp>
-        <p:nvSpPr>
-          <p:cNvPr id="2" name="Title 1"/>
-          <p:cNvSpPr>
-            <a:spLocks noGrp="1"/>
-          </p:cNvSpPr>
-          <p:nvPr>
-            <p:ph type="title"/>
-          </p:nvPr>
-        </p:nvSpPr>
-        <p:spPr/>
-        <p:txBody>
-          <a:bodyPr/>
-          <a:lstStyle/>
-          <a:p>
-            <a:r>
-              <a:rPr lang="en-GB" dirty="0"/>
-              <a:t>Problems with Covariance</a:t>
-            </a:r>
-          </a:p>
-        </p:txBody>
-      </p:sp>
-      <p:sp>
-        <p:nvSpPr>
-          <p:cNvPr id="3" name="Content Placeholder 2"/>
-          <p:cNvSpPr>
-            <a:spLocks noGrp="1"/>
-          </p:cNvSpPr>
-          <p:nvPr>
-            <p:ph idx="1"/>
-          </p:nvPr>
-        </p:nvSpPr>
-        <p:spPr>
-          <a:xfrm>
-            <a:off x="838200" y="1690688"/>
-            <a:ext cx="10515600" cy="4351338"/>
-          </a:xfrm>
-        </p:spPr>
-        <p:txBody>
-          <a:bodyPr>
-            <a:noAutofit/>
-          </a:bodyPr>
-          <a:lstStyle/>
-          <a:p>
-            <a:r>
-              <a:rPr lang="en-GB" sz="3200" dirty="0"/>
-              <a:t>It depends upon the units of measurement</a:t>
-            </a:r>
-          </a:p>
-          <a:p>
-            <a:pPr lvl="1"/>
-            <a:r>
-              <a:rPr lang="en-GB" sz="3200" dirty="0"/>
-              <a:t>E.g. The covariance of two variables measured in Miles might be 4.25, but if the same scores are converted to km, the covariance is 11</a:t>
-            </a:r>
-          </a:p>
-          <a:p>
-            <a:r>
-              <a:rPr lang="en-GB" sz="3200" dirty="0"/>
-              <a:t>One solution: standardise it!</a:t>
-            </a:r>
-          </a:p>
-          <a:p>
-            <a:pPr lvl="1"/>
-            <a:r>
-              <a:rPr lang="en-GB" sz="3200" dirty="0"/>
-              <a:t>Divide by the standard deviations of both variables</a:t>
-            </a:r>
-          </a:p>
-          <a:p>
-            <a:r>
-              <a:rPr lang="en-GB" sz="3200" dirty="0"/>
-              <a:t>The standardised version of covariance is known as the </a:t>
-            </a:r>
-            <a:r>
-              <a:rPr lang="en-GB" sz="3200" b="1" dirty="0"/>
-              <a:t>correlation coefficient </a:t>
-            </a:r>
-            <a:r>
-              <a:rPr lang="en-GB" sz="3200" dirty="0"/>
-              <a:t>– equivalent to the covariance of the standardized variables</a:t>
-            </a:r>
-          </a:p>
-          <a:p>
-            <a:endParaRPr lang="en-GB" sz="3200" dirty="0"/>
-          </a:p>
-        </p:txBody>
-      </p:sp>
-    </p:spTree>
-  </p:cSld>
-  <p:clrMapOvr>
-    <a:masterClrMapping/>
-  </p:clrMapOvr>
-  <p:timing>
-    <p:tnLst>
-      <p:par>
-        <p:cTn id="1" dur="indefinite" restart="never" nodeType="tmRoot">
-          <p:childTnLst>
-            <p:seq concurrent="1" nextAc="seek">
-              <p:cTn id="2" dur="indefinite" nodeType="mainSeq">
-                <p:childTnLst>
-                  <p:par>
-                    <p:cTn id="3" fill="hold">
-                      <p:stCondLst>
-                        <p:cond delay="indefinite"/>
-                      </p:stCondLst>
-                      <p:childTnLst>
-                        <p:par>
-                          <p:cTn id="4" fill="hold">
-                            <p:stCondLst>
-                              <p:cond delay="0"/>
-                            </p:stCondLst>
-                            <p:childTnLst>
-                              <p:par>
-                                <p:cTn id="5" presetID="1" presetClass="entr" presetSubtype="0" fill="hold" grpId="0" nodeType="clickEffect">
-                                  <p:stCondLst>
-                                    <p:cond delay="0"/>
-                                  </p:stCondLst>
-                                  <p:childTnLst>
-                                    <p:set>
-                                      <p:cBhvr>
-                                        <p:cTn id="6" dur="1" fill="hold">
-                                          <p:stCondLst>
-                                            <p:cond delay="0"/>
-                                          </p:stCondLst>
-                                        </p:cTn>
-                                        <p:tgtEl>
-                                          <p:spTgt spid="3">
-                                            <p:txEl>
-                                              <p:pRg st="0" end="0"/>
-                                            </p:txEl>
-                                          </p:spTgt>
-                                        </p:tgtEl>
-                                        <p:attrNameLst>
-                                          <p:attrName>style.visibility</p:attrName>
-                                        </p:attrNameLst>
-                                      </p:cBhvr>
-                                      <p:to>
-                                        <p:strVal val="visible"/>
-                                      </p:to>
-                                    </p:set>
-                                  </p:childTnLst>
-                                </p:cTn>
-                              </p:par>
-                              <p:par>
-                                <p:cTn id="7" presetID="1" presetClass="entr" presetSubtype="0" fill="hold" grpId="0" nodeType="withEffect">
-                                  <p:stCondLst>
-                                    <p:cond delay="0"/>
-                                  </p:stCondLst>
-                                  <p:childTnLst>
-                                    <p:set>
-                                      <p:cBhvr>
-                                        <p:cTn id="8" dur="1" fill="hold">
-                                          <p:stCondLst>
-                                            <p:cond delay="0"/>
-                                          </p:stCondLst>
-                                        </p:cTn>
-                                        <p:tgtEl>
-                                          <p:spTgt spid="3">
-                                            <p:txEl>
-                                              <p:pRg st="1" end="1"/>
-                                            </p:txEl>
-                                          </p:spTgt>
-                                        </p:tgtEl>
-                                        <p:attrNameLst>
-                                          <p:attrName>style.visibility</p:attrName>
-                                        </p:attrNameLst>
-                                      </p:cBhvr>
-                                      <p:to>
-                                        <p:strVal val="visible"/>
-                                      </p:to>
-                                    </p:set>
-                                  </p:childTnLst>
-                                </p:cTn>
-                              </p:par>
-                            </p:childTnLst>
-                          </p:cTn>
-                        </p:par>
-                      </p:childTnLst>
-                    </p:cTn>
-                  </p:par>
-                  <p:par>
-                    <p:cTn id="9" fill="hold">
-                      <p:stCondLst>
-                        <p:cond delay="indefinite"/>
-                      </p:stCondLst>
-                      <p:childTnLst>
-                        <p:par>
-                          <p:cTn id="10" fill="hold">
-                            <p:stCondLst>
-                              <p:cond delay="0"/>
-                            </p:stCondLst>
-                            <p:childTnLst>
-                              <p:par>
-                                <p:cTn id="11" presetID="1" presetClass="entr" presetSubtype="0" fill="hold" grpId="0" nodeType="clickEffect">
-                                  <p:stCondLst>
-                                    <p:cond delay="0"/>
-                                  </p:stCondLst>
-                                  <p:childTnLst>
-                                    <p:set>
-                                      <p:cBhvr>
-                                        <p:cTn id="12" dur="1" fill="hold">
-                                          <p:stCondLst>
-                                            <p:cond delay="0"/>
-                                          </p:stCondLst>
-                                        </p:cTn>
-                                        <p:tgtEl>
-                                          <p:spTgt spid="3">
-                                            <p:txEl>
-                                              <p:pRg st="2" end="2"/>
-                                            </p:txEl>
-                                          </p:spTgt>
-                                        </p:tgtEl>
-                                        <p:attrNameLst>
-                                          <p:attrName>style.visibility</p:attrName>
-                                        </p:attrNameLst>
-                                      </p:cBhvr>
-                                      <p:to>
-                                        <p:strVal val="visible"/>
-                                      </p:to>
-                                    </p:set>
-                                  </p:childTnLst>
-                                </p:cTn>
-                              </p:par>
-                              <p:par>
-                                <p:cTn id="13" presetID="1" presetClass="entr" presetSubtype="0" fill="hold" grpId="0" nodeType="withEffect">
-                                  <p:stCondLst>
-                                    <p:cond delay="0"/>
-                                  </p:stCondLst>
-                                  <p:childTnLst>
-                                    <p:set>
-                                      <p:cBhvr>
-                                        <p:cTn id="14" dur="1" fill="hold">
-                                          <p:stCondLst>
-                                            <p:cond delay="0"/>
-                                          </p:stCondLst>
-                                        </p:cTn>
-                                        <p:tgtEl>
-                                          <p:spTgt spid="3">
-                                            <p:txEl>
-                                              <p:pRg st="3" end="3"/>
-                                            </p:txEl>
-                                          </p:spTgt>
-                                        </p:tgtEl>
-                                        <p:attrNameLst>
-                                          <p:attrName>style.visibility</p:attrName>
-                                        </p:attrNameLst>
-                                      </p:cBhvr>
-                                      <p:to>
-                                        <p:strVal val="visible"/>
-                                      </p:to>
-                                    </p:set>
-                                  </p:childTnLst>
-                                </p:cTn>
-                              </p:par>
-                            </p:childTnLst>
-                          </p:cTn>
-                        </p:par>
-                      </p:childTnLst>
-                    </p:cTn>
-                  </p:par>
-                  <p:par>
-                    <p:cTn id="15" fill="hold">
-                      <p:stCondLst>
-                        <p:cond delay="indefinite"/>
-                      </p:stCondLst>
-                      <p:childTnLst>
-                        <p:par>
-                          <p:cTn id="16" fill="hold">
-                            <p:stCondLst>
-                              <p:cond delay="0"/>
-                            </p:stCondLst>
-                            <p:childTnLst>
-                              <p:par>
-                                <p:cTn id="17" presetID="1" presetClass="entr" presetSubtype="0" fill="hold" grpId="0" nodeType="clickEffect">
-                                  <p:stCondLst>
-                                    <p:cond delay="0"/>
-                                  </p:stCondLst>
-                                  <p:childTnLst>
-                                    <p:set>
-                                      <p:cBhvr>
-                                        <p:cTn id="18" dur="1" fill="hold">
-                                          <p:stCondLst>
-                                            <p:cond delay="0"/>
-                                          </p:stCondLst>
-                                        </p:cTn>
-                                        <p:tgtEl>
-                                          <p:spTgt spid="3">
-                                            <p:txEl>
-                                              <p:pRg st="4" end="4"/>
-                                            </p:txEl>
-                                          </p:spTgt>
-                                        </p:tgtEl>
-                                        <p:attrNameLst>
-                                          <p:attrName>style.visibility</p:attrName>
-                                        </p:attrNameLst>
-                                      </p:cBhvr>
-                                      <p:to>
-                                        <p:strVal val="visible"/>
-                                      </p:to>
-                                    </p:set>
-                                  </p:childTnLst>
-                                </p:cTn>
-                              </p:par>
-                            </p:childTnLst>
-                          </p:cTn>
-                        </p:par>
-                      </p:childTnLst>
-                    </p:cTn>
-                  </p:par>
-                </p:childTnLst>
-              </p:cTn>
-              <p:prevCondLst>
-                <p:cond evt="onPrev" delay="0">
-                  <p:tgtEl>
-                    <p:sldTgt/>
-                  </p:tgtEl>
-                </p:cond>
-              </p:prevCondLst>
-              <p:nextCondLst>
-                <p:cond evt="onNext" delay="0">
-                  <p:tgtEl>
-                    <p:sldTgt/>
-                  </p:tgtEl>
-                </p:cond>
-              </p:nextCondLst>
-            </p:seq>
-          </p:childTnLst>
-        </p:cTn>
-      </p:par>
-    </p:tnLst>
-    <p:bldLst>
-      <p:bldP spid="3" grpId="0" build="p"/>
-    </p:bldLst>
-  </p:timing>
 </p:sld>
 </file>
 
